--- a/Old Rugged Cross_chords.pptx
+++ b/Old Rugged Cross_chords.pptx
@@ -9,15 +9,12 @@
     <p:sldId id="284" r:id="rId3"/>
     <p:sldId id="277" r:id="rId4"/>
     <p:sldId id="276" r:id="rId5"/>
-    <p:sldId id="285" r:id="rId6"/>
-    <p:sldId id="286" r:id="rId7"/>
-    <p:sldId id="287" r:id="rId8"/>
-    <p:sldId id="288" r:id="rId9"/>
-    <p:sldId id="289" r:id="rId10"/>
-    <p:sldId id="290" r:id="rId11"/>
-    <p:sldId id="291" r:id="rId12"/>
-    <p:sldId id="292" r:id="rId13"/>
-    <p:sldId id="293" r:id="rId14"/>
+    <p:sldId id="286" r:id="rId6"/>
+    <p:sldId id="287" r:id="rId7"/>
+    <p:sldId id="294" r:id="rId8"/>
+    <p:sldId id="290" r:id="rId9"/>
+    <p:sldId id="291" r:id="rId10"/>
+    <p:sldId id="295" r:id="rId11"/>
   </p:sldIdLst>
   <p:sldSz cx="12192000" cy="6858000"/>
   <p:notesSz cx="6858000" cy="9144000"/>
@@ -271,7 +268,7 @@
           <a:p>
             <a:fld id="{E759A0DE-F190-5444-87AC-4719D5F20D15}" type="datetimeFigureOut">
               <a:rPr lang="en-US" smtClean="0"/>
-              <a:t>3/31/26</a:t>
+              <a:t>4/3/26</a:t>
             </a:fld>
             <a:endParaRPr lang="en-US"/>
           </a:p>
@@ -469,7 +466,7 @@
           <a:p>
             <a:fld id="{E759A0DE-F190-5444-87AC-4719D5F20D15}" type="datetimeFigureOut">
               <a:rPr lang="en-US" smtClean="0"/>
-              <a:t>3/31/26</a:t>
+              <a:t>4/3/26</a:t>
             </a:fld>
             <a:endParaRPr lang="en-US"/>
           </a:p>
@@ -677,7 +674,7 @@
           <a:p>
             <a:fld id="{E759A0DE-F190-5444-87AC-4719D5F20D15}" type="datetimeFigureOut">
               <a:rPr lang="en-US" smtClean="0"/>
-              <a:t>3/31/26</a:t>
+              <a:t>4/3/26</a:t>
             </a:fld>
             <a:endParaRPr lang="en-US"/>
           </a:p>
@@ -875,7 +872,7 @@
           <a:p>
             <a:fld id="{E759A0DE-F190-5444-87AC-4719D5F20D15}" type="datetimeFigureOut">
               <a:rPr lang="en-US" smtClean="0"/>
-              <a:t>3/31/26</a:t>
+              <a:t>4/3/26</a:t>
             </a:fld>
             <a:endParaRPr lang="en-US"/>
           </a:p>
@@ -1150,7 +1147,7 @@
           <a:p>
             <a:fld id="{E759A0DE-F190-5444-87AC-4719D5F20D15}" type="datetimeFigureOut">
               <a:rPr lang="en-US" smtClean="0"/>
-              <a:t>3/31/26</a:t>
+              <a:t>4/3/26</a:t>
             </a:fld>
             <a:endParaRPr lang="en-US"/>
           </a:p>
@@ -1415,7 +1412,7 @@
           <a:p>
             <a:fld id="{E759A0DE-F190-5444-87AC-4719D5F20D15}" type="datetimeFigureOut">
               <a:rPr lang="en-US" smtClean="0"/>
-              <a:t>3/31/26</a:t>
+              <a:t>4/3/26</a:t>
             </a:fld>
             <a:endParaRPr lang="en-US"/>
           </a:p>
@@ -1827,7 +1824,7 @@
           <a:p>
             <a:fld id="{E759A0DE-F190-5444-87AC-4719D5F20D15}" type="datetimeFigureOut">
               <a:rPr lang="en-US" smtClean="0"/>
-              <a:t>3/31/26</a:t>
+              <a:t>4/3/26</a:t>
             </a:fld>
             <a:endParaRPr lang="en-US"/>
           </a:p>
@@ -1968,7 +1965,7 @@
           <a:p>
             <a:fld id="{E759A0DE-F190-5444-87AC-4719D5F20D15}" type="datetimeFigureOut">
               <a:rPr lang="en-US" smtClean="0"/>
-              <a:t>3/31/26</a:t>
+              <a:t>4/3/26</a:t>
             </a:fld>
             <a:endParaRPr lang="en-US"/>
           </a:p>
@@ -2081,7 +2078,7 @@
           <a:p>
             <a:fld id="{E759A0DE-F190-5444-87AC-4719D5F20D15}" type="datetimeFigureOut">
               <a:rPr lang="en-US" smtClean="0"/>
-              <a:t>3/31/26</a:t>
+              <a:t>4/3/26</a:t>
             </a:fld>
             <a:endParaRPr lang="en-US"/>
           </a:p>
@@ -2392,7 +2389,7 @@
           <a:p>
             <a:fld id="{E759A0DE-F190-5444-87AC-4719D5F20D15}" type="datetimeFigureOut">
               <a:rPr lang="en-US" smtClean="0"/>
-              <a:t>3/31/26</a:t>
+              <a:t>4/3/26</a:t>
             </a:fld>
             <a:endParaRPr lang="en-US"/>
           </a:p>
@@ -2680,7 +2677,7 @@
           <a:p>
             <a:fld id="{E759A0DE-F190-5444-87AC-4719D5F20D15}" type="datetimeFigureOut">
               <a:rPr lang="en-US" smtClean="0"/>
-              <a:t>3/31/26</a:t>
+              <a:t>4/3/26</a:t>
             </a:fld>
             <a:endParaRPr lang="en-US"/>
           </a:p>
@@ -2921,7 +2918,7 @@
           <a:p>
             <a:fld id="{E759A0DE-F190-5444-87AC-4719D5F20D15}" type="datetimeFigureOut">
               <a:rPr lang="en-US" smtClean="0"/>
-              <a:t>3/31/26</a:t>
+              <a:t>4/3/26</a:t>
             </a:fld>
             <a:endParaRPr lang="en-US"/>
           </a:p>
@@ -3850,7 +3847,9 @@
     <p:bg>
       <p:bgPr>
         <a:solidFill>
-          <a:schemeClr val="accent1"/>
+          <a:schemeClr val="accent5">
+            <a:lumMod val="50000"/>
+          </a:schemeClr>
         </a:solidFill>
         <a:effectLst/>
       </p:bgPr>
@@ -3860,7 +3859,7 @@
         <p:cNvPr id="1" name="">
           <a:extLst>
             <a:ext uri="{FF2B5EF4-FFF2-40B4-BE49-F238E27FC236}">
-              <a16:creationId xmlns:a16="http://schemas.microsoft.com/office/drawing/2014/main" id="{02E243F4-CB94-4B76-F4FF-E83C2857E4CA}"/>
+              <a16:creationId xmlns:a16="http://schemas.microsoft.com/office/drawing/2014/main" id="{CE0CE6E1-3FFD-7C26-239E-DA4BE44AE5D0}"/>
             </a:ext>
           </a:extLst>
         </p:cNvPr>
@@ -3880,7 +3879,7 @@
           <p:cNvPr id="3" name="Subtitle 2">
             <a:extLst>
               <a:ext uri="{FF2B5EF4-FFF2-40B4-BE49-F238E27FC236}">
-                <a16:creationId xmlns:a16="http://schemas.microsoft.com/office/drawing/2014/main" id="{8FD418CD-25A3-F123-3FB3-BBD6FDAC04B9}"/>
+                <a16:creationId xmlns:a16="http://schemas.microsoft.com/office/drawing/2014/main" id="{B28FD1C5-E0F7-8987-8AF0-8FE910D5FF6A}"/>
               </a:ext>
             </a:extLst>
           </p:cNvPr>
@@ -3903,6 +3902,125 @@
           </a:bodyPr>
           <a:lstStyle/>
           <a:p>
+            <a:pPr algn="l"/>
+            <a:r>
+              <a:rPr lang="en-US" sz="4400" dirty="0">
+                <a:solidFill>
+                  <a:schemeClr val="bg1"/>
+                </a:solidFill>
+                <a:latin typeface="Avenir Medium" panose="02000503020000020003" pitchFamily="2" charset="0"/>
+                <a:ea typeface="Bodoni Ornaments" pitchFamily="2" charset="0"/>
+              </a:rPr>
+              <a:t>          </a:t>
+            </a:r>
+            <a:r>
+              <a:rPr lang="en-US" sz="3600" dirty="0">
+                <a:solidFill>
+                  <a:srgbClr val="FFFF00"/>
+                </a:solidFill>
+                <a:latin typeface="Avenir Medium" panose="02000503020000020003" pitchFamily="2" charset="0"/>
+                <a:ea typeface="Bodoni Ornaments" pitchFamily="2" charset="0"/>
+              </a:rPr>
+              <a:t>D                                            G</a:t>
+            </a:r>
+          </a:p>
+          <a:p>
+            <a:pPr algn="l"/>
+            <a:r>
+              <a:rPr lang="en-US" sz="4400" dirty="0">
+                <a:solidFill>
+                  <a:schemeClr val="bg1"/>
+                </a:solidFill>
+                <a:latin typeface="Avenir Medium" panose="02000503020000020003" pitchFamily="2" charset="0"/>
+                <a:ea typeface="Bodoni Ornaments" pitchFamily="2" charset="0"/>
+              </a:rPr>
+              <a:t>So I’ll cherish the old rugged cross</a:t>
+            </a:r>
+          </a:p>
+          <a:p>
+            <a:pPr algn="l"/>
+            <a:r>
+              <a:rPr lang="en-US" sz="3600" dirty="0">
+                <a:solidFill>
+                  <a:srgbClr val="FFFF00"/>
+                </a:solidFill>
+                <a:latin typeface="Avenir Medium" panose="02000503020000020003" pitchFamily="2" charset="0"/>
+                <a:ea typeface="Bodoni Ornaments" pitchFamily="2" charset="0"/>
+              </a:rPr>
+              <a:t>              C                                      G</a:t>
+            </a:r>
+          </a:p>
+          <a:p>
+            <a:pPr algn="l"/>
+            <a:r>
+              <a:rPr lang="en-US" sz="4400" dirty="0">
+                <a:solidFill>
+                  <a:schemeClr val="bg1"/>
+                </a:solidFill>
+                <a:latin typeface="Avenir Medium" panose="02000503020000020003" pitchFamily="2" charset="0"/>
+                <a:ea typeface="Bodoni Ornaments" pitchFamily="2" charset="0"/>
+              </a:rPr>
+              <a:t>Till my trophies at last I lay down</a:t>
+            </a:r>
+          </a:p>
+          <a:p>
+            <a:pPr algn="l"/>
+            <a:r>
+              <a:rPr lang="en-US" sz="3600" dirty="0">
+                <a:solidFill>
+                  <a:schemeClr val="bg1"/>
+                </a:solidFill>
+                <a:latin typeface="Avenir Medium" panose="02000503020000020003" pitchFamily="2" charset="0"/>
+                <a:ea typeface="Bodoni Ornaments" pitchFamily="2" charset="0"/>
+              </a:rPr>
+              <a:t>           </a:t>
+            </a:r>
+            <a:r>
+              <a:rPr lang="en-US" sz="3600" dirty="0">
+                <a:solidFill>
+                  <a:srgbClr val="FFFF00"/>
+                </a:solidFill>
+                <a:latin typeface="Avenir Medium" panose="02000503020000020003" pitchFamily="2" charset="0"/>
+                <a:ea typeface="Bodoni Ornaments" pitchFamily="2" charset="0"/>
+              </a:rPr>
+              <a:t>G                                            C</a:t>
+            </a:r>
+          </a:p>
+          <a:p>
+            <a:pPr algn="l"/>
+            <a:r>
+              <a:rPr lang="en-US" sz="4400" dirty="0">
+                <a:solidFill>
+                  <a:schemeClr val="bg1"/>
+                </a:solidFill>
+                <a:latin typeface="Avenir Medium" panose="02000503020000020003" pitchFamily="2" charset="0"/>
+                <a:ea typeface="Bodoni Ornaments" pitchFamily="2" charset="0"/>
+              </a:rPr>
+              <a:t>I will cling to the old rugged cross</a:t>
+            </a:r>
+          </a:p>
+          <a:p>
+            <a:pPr algn="l"/>
+            <a:r>
+              <a:rPr lang="en-US" sz="4400" dirty="0">
+                <a:solidFill>
+                  <a:schemeClr val="bg1"/>
+                </a:solidFill>
+                <a:latin typeface="Avenir Medium" panose="02000503020000020003" pitchFamily="2" charset="0"/>
+                <a:ea typeface="Bodoni Ornaments" pitchFamily="2" charset="0"/>
+              </a:rPr>
+              <a:t>  </a:t>
+            </a:r>
+            <a:r>
+              <a:rPr lang="en-US" sz="3600" dirty="0">
+                <a:solidFill>
+                  <a:srgbClr val="FFFF00"/>
+                </a:solidFill>
+                <a:latin typeface="Avenir Medium" panose="02000503020000020003" pitchFamily="2" charset="0"/>
+                <a:ea typeface="Bodoni Ornaments" pitchFamily="2" charset="0"/>
+              </a:rPr>
+              <a:t>        G                                D                 G</a:t>
+            </a:r>
             <a:endParaRPr lang="en-US" sz="4400" dirty="0">
               <a:solidFill>
                 <a:schemeClr val="bg1"/>
@@ -3912,6 +4030,20 @@
             </a:endParaRPr>
           </a:p>
           <a:p>
+            <a:pPr algn="l"/>
+            <a:r>
+              <a:rPr lang="en-US" sz="4400" dirty="0">
+                <a:solidFill>
+                  <a:schemeClr val="bg1"/>
+                </a:solidFill>
+                <a:latin typeface="Avenir Medium" panose="02000503020000020003" pitchFamily="2" charset="0"/>
+                <a:ea typeface="Bodoni Ornaments" pitchFamily="2" charset="0"/>
+              </a:rPr>
+              <a:t>And exchange it some day for a crown</a:t>
+            </a:r>
+          </a:p>
+          <a:p>
+            <a:pPr algn="l"/>
             <a:endParaRPr lang="en-US" sz="4400" dirty="0">
               <a:solidFill>
                 <a:schemeClr val="bg1"/>
@@ -3920,439 +4052,12 @@
               <a:ea typeface="Bodoni Ornaments" pitchFamily="2" charset="0"/>
             </a:endParaRPr>
           </a:p>
-          <a:p>
-            <a:r>
-              <a:rPr lang="en-US" sz="4400" dirty="0">
-                <a:solidFill>
-                  <a:schemeClr val="bg1"/>
-                </a:solidFill>
-                <a:latin typeface="Avenir Medium" panose="02000503020000020003" pitchFamily="2" charset="0"/>
-                <a:ea typeface="Bodoni Ornaments" pitchFamily="2" charset="0"/>
-              </a:rPr>
-              <a:t>In the old rugged cross, </a:t>
-            </a:r>
-          </a:p>
-          <a:p>
-            <a:r>
-              <a:rPr lang="en-US" sz="4400" dirty="0">
-                <a:solidFill>
-                  <a:schemeClr val="bg1"/>
-                </a:solidFill>
-                <a:latin typeface="Avenir Medium" panose="02000503020000020003" pitchFamily="2" charset="0"/>
-                <a:ea typeface="Bodoni Ornaments" pitchFamily="2" charset="0"/>
-              </a:rPr>
-              <a:t>stained with blood so divine,</a:t>
-            </a:r>
-          </a:p>
-          <a:p>
-            <a:r>
-              <a:rPr lang="en-US" sz="4400" dirty="0">
-                <a:solidFill>
-                  <a:schemeClr val="bg1"/>
-                </a:solidFill>
-                <a:latin typeface="Avenir Medium" panose="02000503020000020003" pitchFamily="2" charset="0"/>
-                <a:ea typeface="Bodoni Ornaments" pitchFamily="2" charset="0"/>
-              </a:rPr>
-              <a:t>  A wondrous beauty I see;</a:t>
-            </a:r>
-          </a:p>
         </p:txBody>
       </p:sp>
     </p:spTree>
     <p:extLst>
       <p:ext uri="{BB962C8B-B14F-4D97-AF65-F5344CB8AC3E}">
-        <p14:creationId xmlns:p14="http://schemas.microsoft.com/office/powerpoint/2010/main" val="1369999494"/>
-      </p:ext>
-    </p:extLst>
-  </p:cSld>
-  <p:clrMapOvr>
-    <a:masterClrMapping/>
-  </p:clrMapOvr>
-</p:sld>
-</file>
-
-<file path=ppt/slides/slide11.xml><?xml version="1.0" encoding="utf-8"?>
-<p:sld xmlns:a="http://schemas.openxmlformats.org/drawingml/2006/main" xmlns:r="http://schemas.openxmlformats.org/officeDocument/2006/relationships" xmlns:p="http://schemas.openxmlformats.org/presentationml/2006/main">
-  <p:cSld>
-    <p:bg>
-      <p:bgPr>
-        <a:solidFill>
-          <a:schemeClr val="accent1"/>
-        </a:solidFill>
-        <a:effectLst/>
-      </p:bgPr>
-    </p:bg>
-    <p:spTree>
-      <p:nvGrpSpPr>
-        <p:cNvPr id="1" name="">
-          <a:extLst>
-            <a:ext uri="{FF2B5EF4-FFF2-40B4-BE49-F238E27FC236}">
-              <a16:creationId xmlns:a16="http://schemas.microsoft.com/office/drawing/2014/main" id="{51B7D9DD-9FDF-188B-B04F-CC4F610B705A}"/>
-            </a:ext>
-          </a:extLst>
-        </p:cNvPr>
-        <p:cNvGrpSpPr/>
-        <p:nvPr/>
-      </p:nvGrpSpPr>
-      <p:grpSpPr>
-        <a:xfrm>
-          <a:off x="0" y="0"/>
-          <a:ext cx="0" cy="0"/>
-          <a:chOff x="0" y="0"/>
-          <a:chExt cx="0" cy="0"/>
-        </a:xfrm>
-      </p:grpSpPr>
-      <p:sp>
-        <p:nvSpPr>
-          <p:cNvPr id="3" name="Subtitle 2">
-            <a:extLst>
-              <a:ext uri="{FF2B5EF4-FFF2-40B4-BE49-F238E27FC236}">
-                <a16:creationId xmlns:a16="http://schemas.microsoft.com/office/drawing/2014/main" id="{E3DC8BB0-FF14-6E79-C19F-DC425DCC2CDA}"/>
-              </a:ext>
-            </a:extLst>
-          </p:cNvPr>
-          <p:cNvSpPr>
-            <a:spLocks noGrp="1"/>
-          </p:cNvSpPr>
-          <p:nvPr>
-            <p:ph type="subTitle" idx="1"/>
-          </p:nvPr>
-        </p:nvSpPr>
-        <p:spPr>
-          <a:xfrm>
-            <a:off x="682831" y="497702"/>
-            <a:ext cx="10826338" cy="5862596"/>
-          </a:xfrm>
-        </p:spPr>
-        <p:txBody>
-          <a:bodyPr>
-            <a:noAutofit/>
-          </a:bodyPr>
-          <a:lstStyle/>
-          <a:p>
-            <a:endParaRPr lang="en-US" sz="4400" dirty="0">
-              <a:solidFill>
-                <a:schemeClr val="bg1"/>
-              </a:solidFill>
-              <a:latin typeface="Avenir Medium" panose="02000503020000020003" pitchFamily="2" charset="0"/>
-              <a:ea typeface="Bodoni Ornaments" pitchFamily="2" charset="0"/>
-            </a:endParaRPr>
-          </a:p>
-          <a:p>
-            <a:endParaRPr lang="en-US" sz="4400" dirty="0">
-              <a:solidFill>
-                <a:schemeClr val="bg1"/>
-              </a:solidFill>
-              <a:latin typeface="Avenir Medium" panose="02000503020000020003" pitchFamily="2" charset="0"/>
-              <a:ea typeface="Bodoni Ornaments" pitchFamily="2" charset="0"/>
-            </a:endParaRPr>
-          </a:p>
-          <a:p>
-            <a:r>
-              <a:rPr lang="en-US" sz="4400" dirty="0">
-                <a:solidFill>
-                  <a:schemeClr val="bg1"/>
-                </a:solidFill>
-                <a:latin typeface="Avenir Medium" panose="02000503020000020003" pitchFamily="2" charset="0"/>
-                <a:ea typeface="Bodoni Ornaments" pitchFamily="2" charset="0"/>
-              </a:rPr>
-              <a:t>For ’twas on that old cross </a:t>
-            </a:r>
-          </a:p>
-          <a:p>
-            <a:r>
-              <a:rPr lang="en-US" sz="4400" dirty="0">
-                <a:solidFill>
-                  <a:schemeClr val="bg1"/>
-                </a:solidFill>
-                <a:latin typeface="Avenir Medium" panose="02000503020000020003" pitchFamily="2" charset="0"/>
-                <a:ea typeface="Bodoni Ornaments" pitchFamily="2" charset="0"/>
-              </a:rPr>
-              <a:t>Jesus suffered and died,</a:t>
-            </a:r>
-          </a:p>
-          <a:p>
-            <a:r>
-              <a:rPr lang="en-US" sz="4400" dirty="0">
-                <a:solidFill>
-                  <a:schemeClr val="bg1"/>
-                </a:solidFill>
-                <a:latin typeface="Avenir Medium" panose="02000503020000020003" pitchFamily="2" charset="0"/>
-                <a:ea typeface="Bodoni Ornaments" pitchFamily="2" charset="0"/>
-              </a:rPr>
-              <a:t>  To pardon and sanctify me</a:t>
-            </a:r>
-          </a:p>
-        </p:txBody>
-      </p:sp>
-    </p:spTree>
-    <p:extLst>
-      <p:ext uri="{BB962C8B-B14F-4D97-AF65-F5344CB8AC3E}">
-        <p14:creationId xmlns:p14="http://schemas.microsoft.com/office/powerpoint/2010/main" val="743354268"/>
-      </p:ext>
-    </p:extLst>
-  </p:cSld>
-  <p:clrMapOvr>
-    <a:masterClrMapping/>
-  </p:clrMapOvr>
-</p:sld>
-</file>
-
-<file path=ppt/slides/slide12.xml><?xml version="1.0" encoding="utf-8"?>
-<p:sld xmlns:a="http://schemas.openxmlformats.org/drawingml/2006/main" xmlns:r="http://schemas.openxmlformats.org/officeDocument/2006/relationships" xmlns:p="http://schemas.openxmlformats.org/presentationml/2006/main">
-  <p:cSld>
-    <p:bg>
-      <p:bgPr>
-        <a:solidFill>
-          <a:schemeClr val="accent5">
-            <a:lumMod val="50000"/>
-          </a:schemeClr>
-        </a:solidFill>
-        <a:effectLst/>
-      </p:bgPr>
-    </p:bg>
-    <p:spTree>
-      <p:nvGrpSpPr>
-        <p:cNvPr id="1" name="">
-          <a:extLst>
-            <a:ext uri="{FF2B5EF4-FFF2-40B4-BE49-F238E27FC236}">
-              <a16:creationId xmlns:a16="http://schemas.microsoft.com/office/drawing/2014/main" id="{4B4B8507-2E93-95AB-B389-0BBC98C7D460}"/>
-            </a:ext>
-          </a:extLst>
-        </p:cNvPr>
-        <p:cNvGrpSpPr/>
-        <p:nvPr/>
-      </p:nvGrpSpPr>
-      <p:grpSpPr>
-        <a:xfrm>
-          <a:off x="0" y="0"/>
-          <a:ext cx="0" cy="0"/>
-          <a:chOff x="0" y="0"/>
-          <a:chExt cx="0" cy="0"/>
-        </a:xfrm>
-      </p:grpSpPr>
-      <p:sp>
-        <p:nvSpPr>
-          <p:cNvPr id="3" name="Subtitle 2">
-            <a:extLst>
-              <a:ext uri="{FF2B5EF4-FFF2-40B4-BE49-F238E27FC236}">
-                <a16:creationId xmlns:a16="http://schemas.microsoft.com/office/drawing/2014/main" id="{8A0E62C6-0CC3-2564-490A-1E626FCB4FFC}"/>
-              </a:ext>
-            </a:extLst>
-          </p:cNvPr>
-          <p:cNvSpPr>
-            <a:spLocks noGrp="1"/>
-          </p:cNvSpPr>
-          <p:nvPr>
-            <p:ph type="subTitle" idx="1"/>
-          </p:nvPr>
-        </p:nvSpPr>
-        <p:spPr>
-          <a:xfrm>
-            <a:off x="682831" y="497702"/>
-            <a:ext cx="10826338" cy="5862596"/>
-          </a:xfrm>
-        </p:spPr>
-        <p:txBody>
-          <a:bodyPr>
-            <a:noAutofit/>
-          </a:bodyPr>
-          <a:lstStyle/>
-          <a:p>
-            <a:endParaRPr lang="en-US" sz="4400" dirty="0">
-              <a:solidFill>
-                <a:schemeClr val="bg1"/>
-              </a:solidFill>
-              <a:latin typeface="Avenir Medium" panose="02000503020000020003" pitchFamily="2" charset="0"/>
-              <a:ea typeface="Bodoni Ornaments" pitchFamily="2" charset="0"/>
-            </a:endParaRPr>
-          </a:p>
-          <a:p>
-            <a:endParaRPr lang="en-US" sz="4400" dirty="0">
-              <a:solidFill>
-                <a:schemeClr val="bg1"/>
-              </a:solidFill>
-              <a:latin typeface="Avenir Medium" panose="02000503020000020003" pitchFamily="2" charset="0"/>
-              <a:ea typeface="Bodoni Ornaments" pitchFamily="2" charset="0"/>
-            </a:endParaRPr>
-          </a:p>
-          <a:p>
-            <a:r>
-              <a:rPr lang="en-US" sz="4400" dirty="0">
-                <a:solidFill>
-                  <a:schemeClr val="bg1"/>
-                </a:solidFill>
-                <a:latin typeface="Avenir Medium" panose="02000503020000020003" pitchFamily="2" charset="0"/>
-                <a:ea typeface="Bodoni Ornaments" pitchFamily="2" charset="0"/>
-              </a:rPr>
-              <a:t>So I’ll cherish the old rugged cross</a:t>
-            </a:r>
-          </a:p>
-          <a:p>
-            <a:endParaRPr lang="en-US" sz="4400" dirty="0">
-              <a:solidFill>
-                <a:schemeClr val="bg1"/>
-              </a:solidFill>
-              <a:latin typeface="Avenir Medium" panose="02000503020000020003" pitchFamily="2" charset="0"/>
-              <a:ea typeface="Bodoni Ornaments" pitchFamily="2" charset="0"/>
-            </a:endParaRPr>
-          </a:p>
-          <a:p>
-            <a:r>
-              <a:rPr lang="en-US" sz="4400" dirty="0">
-                <a:solidFill>
-                  <a:schemeClr val="bg1"/>
-                </a:solidFill>
-                <a:latin typeface="Avenir Medium" panose="02000503020000020003" pitchFamily="2" charset="0"/>
-                <a:ea typeface="Bodoni Ornaments" pitchFamily="2" charset="0"/>
-              </a:rPr>
-              <a:t>Till my trophies at last I lay down</a:t>
-            </a:r>
-          </a:p>
-          <a:p>
-            <a:endParaRPr lang="en-US" sz="4400" dirty="0">
-              <a:solidFill>
-                <a:schemeClr val="bg1"/>
-              </a:solidFill>
-              <a:latin typeface="Avenir Medium" panose="02000503020000020003" pitchFamily="2" charset="0"/>
-              <a:ea typeface="Bodoni Ornaments" pitchFamily="2" charset="0"/>
-            </a:endParaRPr>
-          </a:p>
-        </p:txBody>
-      </p:sp>
-    </p:spTree>
-    <p:extLst>
-      <p:ext uri="{BB962C8B-B14F-4D97-AF65-F5344CB8AC3E}">
-        <p14:creationId xmlns:p14="http://schemas.microsoft.com/office/powerpoint/2010/main" val="3202436822"/>
-      </p:ext>
-    </p:extLst>
-  </p:cSld>
-  <p:clrMapOvr>
-    <a:masterClrMapping/>
-  </p:clrMapOvr>
-</p:sld>
-</file>
-
-<file path=ppt/slides/slide13.xml><?xml version="1.0" encoding="utf-8"?>
-<p:sld xmlns:a="http://schemas.openxmlformats.org/drawingml/2006/main" xmlns:r="http://schemas.openxmlformats.org/officeDocument/2006/relationships" xmlns:p="http://schemas.openxmlformats.org/presentationml/2006/main">
-  <p:cSld>
-    <p:bg>
-      <p:bgPr>
-        <a:solidFill>
-          <a:schemeClr val="accent5">
-            <a:lumMod val="50000"/>
-          </a:schemeClr>
-        </a:solidFill>
-        <a:effectLst/>
-      </p:bgPr>
-    </p:bg>
-    <p:spTree>
-      <p:nvGrpSpPr>
-        <p:cNvPr id="1" name="">
-          <a:extLst>
-            <a:ext uri="{FF2B5EF4-FFF2-40B4-BE49-F238E27FC236}">
-              <a16:creationId xmlns:a16="http://schemas.microsoft.com/office/drawing/2014/main" id="{4F1EC472-1C0C-8340-E862-916590D397C8}"/>
-            </a:ext>
-          </a:extLst>
-        </p:cNvPr>
-        <p:cNvGrpSpPr/>
-        <p:nvPr/>
-      </p:nvGrpSpPr>
-      <p:grpSpPr>
-        <a:xfrm>
-          <a:off x="0" y="0"/>
-          <a:ext cx="0" cy="0"/>
-          <a:chOff x="0" y="0"/>
-          <a:chExt cx="0" cy="0"/>
-        </a:xfrm>
-      </p:grpSpPr>
-      <p:sp>
-        <p:nvSpPr>
-          <p:cNvPr id="3" name="Subtitle 2">
-            <a:extLst>
-              <a:ext uri="{FF2B5EF4-FFF2-40B4-BE49-F238E27FC236}">
-                <a16:creationId xmlns:a16="http://schemas.microsoft.com/office/drawing/2014/main" id="{D9029FC0-C4B4-086D-80FA-307DBB5CF3F9}"/>
-              </a:ext>
-            </a:extLst>
-          </p:cNvPr>
-          <p:cNvSpPr>
-            <a:spLocks noGrp="1"/>
-          </p:cNvSpPr>
-          <p:nvPr>
-            <p:ph type="subTitle" idx="1"/>
-          </p:nvPr>
-        </p:nvSpPr>
-        <p:spPr>
-          <a:xfrm>
-            <a:off x="682831" y="497702"/>
-            <a:ext cx="10826338" cy="5862596"/>
-          </a:xfrm>
-        </p:spPr>
-        <p:txBody>
-          <a:bodyPr>
-            <a:noAutofit/>
-          </a:bodyPr>
-          <a:lstStyle/>
-          <a:p>
-            <a:endParaRPr lang="en-US" sz="4400" dirty="0">
-              <a:solidFill>
-                <a:schemeClr val="bg1"/>
-              </a:solidFill>
-              <a:latin typeface="Avenir Medium" panose="02000503020000020003" pitchFamily="2" charset="0"/>
-              <a:ea typeface="Bodoni Ornaments" pitchFamily="2" charset="0"/>
-            </a:endParaRPr>
-          </a:p>
-          <a:p>
-            <a:endParaRPr lang="en-US" sz="4400" dirty="0">
-              <a:solidFill>
-                <a:schemeClr val="bg1"/>
-              </a:solidFill>
-              <a:latin typeface="Avenir Medium" panose="02000503020000020003" pitchFamily="2" charset="0"/>
-              <a:ea typeface="Bodoni Ornaments" pitchFamily="2" charset="0"/>
-            </a:endParaRPr>
-          </a:p>
-          <a:p>
-            <a:r>
-              <a:rPr lang="en-US" sz="4400" dirty="0">
-                <a:solidFill>
-                  <a:schemeClr val="bg1"/>
-                </a:solidFill>
-                <a:latin typeface="Avenir Medium" panose="02000503020000020003" pitchFamily="2" charset="0"/>
-                <a:ea typeface="Bodoni Ornaments" pitchFamily="2" charset="0"/>
-              </a:rPr>
-              <a:t>I will cling to the old rugged cross</a:t>
-            </a:r>
-          </a:p>
-          <a:p>
-            <a:r>
-              <a:rPr lang="en-US" sz="4400" dirty="0">
-                <a:solidFill>
-                  <a:schemeClr val="bg1"/>
-                </a:solidFill>
-                <a:latin typeface="Avenir Medium" panose="02000503020000020003" pitchFamily="2" charset="0"/>
-                <a:ea typeface="Bodoni Ornaments" pitchFamily="2" charset="0"/>
-              </a:rPr>
-              <a:t>  </a:t>
-            </a:r>
-          </a:p>
-          <a:p>
-            <a:r>
-              <a:rPr lang="en-US" sz="4400" dirty="0">
-                <a:solidFill>
-                  <a:schemeClr val="bg1"/>
-                </a:solidFill>
-                <a:latin typeface="Avenir Medium" panose="02000503020000020003" pitchFamily="2" charset="0"/>
-                <a:ea typeface="Bodoni Ornaments" pitchFamily="2" charset="0"/>
-              </a:rPr>
-              <a:t>And exchange it some day for a crown</a:t>
-            </a:r>
-          </a:p>
-        </p:txBody>
-      </p:sp>
-    </p:spTree>
-    <p:extLst>
-      <p:ext uri="{BB962C8B-B14F-4D97-AF65-F5344CB8AC3E}">
-        <p14:creationId xmlns:p14="http://schemas.microsoft.com/office/powerpoint/2010/main" val="4033103774"/>
+        <p14:creationId xmlns:p14="http://schemas.microsoft.com/office/powerpoint/2010/main" val="2807009757"/>
       </p:ext>
     </p:extLst>
   </p:cSld>
@@ -4421,6 +4126,7 @@
           </a:bodyPr>
           <a:lstStyle/>
           <a:p>
+            <a:pPr algn="l"/>
             <a:endParaRPr lang="en-US" sz="4400" dirty="0">
               <a:solidFill>
                 <a:schemeClr val="bg1"/>
@@ -4430,15 +4136,20 @@
             </a:endParaRPr>
           </a:p>
           <a:p>
-            <a:endParaRPr lang="en-US" sz="4400" dirty="0">
-              <a:solidFill>
-                <a:schemeClr val="bg1"/>
-              </a:solidFill>
-              <a:latin typeface="Avenir Medium" panose="02000503020000020003" pitchFamily="2" charset="0"/>
-              <a:ea typeface="Bodoni Ornaments" pitchFamily="2" charset="0"/>
-            </a:endParaRPr>
-          </a:p>
-          <a:p>
+            <a:pPr algn="l"/>
+            <a:r>
+              <a:rPr lang="en-US" sz="3600" dirty="0">
+                <a:solidFill>
+                  <a:srgbClr val="FFFF00"/>
+                </a:solidFill>
+                <a:latin typeface="Avenir Medium" panose="02000503020000020003" pitchFamily="2" charset="0"/>
+                <a:ea typeface="Bodoni Ornaments" pitchFamily="2" charset="0"/>
+              </a:rPr>
+              <a:t>G</a:t>
+            </a:r>
+          </a:p>
+          <a:p>
+            <a:pPr algn="l"/>
             <a:r>
               <a:rPr lang="en-US" sz="4400" dirty="0">
                 <a:solidFill>
@@ -4451,6 +4162,30 @@
             </a:r>
           </a:p>
           <a:p>
+            <a:pPr algn="l"/>
+            <a:r>
+              <a:rPr lang="en-US" sz="3600" dirty="0">
+                <a:solidFill>
+                  <a:schemeClr val="bg1"/>
+                </a:solidFill>
+                <a:latin typeface="Avenir Medium" panose="02000503020000020003" pitchFamily="2" charset="0"/>
+                <a:ea typeface="Bodoni Ornaments" pitchFamily="2" charset="0"/>
+              </a:rPr>
+              <a:t>                   </a:t>
+            </a:r>
+            <a:r>
+              <a:rPr lang="en-US" sz="3600" dirty="0">
+                <a:solidFill>
+                  <a:srgbClr val="FFFF00"/>
+                </a:solidFill>
+                <a:latin typeface="Avenir Medium" panose="02000503020000020003" pitchFamily="2" charset="0"/>
+                <a:ea typeface="Bodoni Ornaments" pitchFamily="2" charset="0"/>
+              </a:rPr>
+              <a:t>C</a:t>
+            </a:r>
+          </a:p>
+          <a:p>
+            <a:pPr algn="l"/>
             <a:r>
               <a:rPr lang="en-US" sz="4400" dirty="0">
                 <a:solidFill>
@@ -4463,6 +4198,30 @@
             </a:r>
           </a:p>
           <a:p>
+            <a:pPr algn="l"/>
+            <a:r>
+              <a:rPr lang="en-US" sz="3600" dirty="0">
+                <a:solidFill>
+                  <a:schemeClr val="bg1"/>
+                </a:solidFill>
+                <a:latin typeface="Avenir Medium" panose="02000503020000020003" pitchFamily="2" charset="0"/>
+                <a:ea typeface="Bodoni Ornaments" pitchFamily="2" charset="0"/>
+              </a:rPr>
+              <a:t>         </a:t>
+            </a:r>
+            <a:r>
+              <a:rPr lang="en-US" sz="3600" dirty="0">
+                <a:solidFill>
+                  <a:srgbClr val="FFFF00"/>
+                </a:solidFill>
+                <a:latin typeface="Avenir Medium" panose="02000503020000020003" pitchFamily="2" charset="0"/>
+                <a:ea typeface="Bodoni Ornaments" pitchFamily="2" charset="0"/>
+              </a:rPr>
+              <a:t>D                                             G</a:t>
+            </a:r>
+          </a:p>
+          <a:p>
+            <a:pPr algn="l"/>
             <a:r>
               <a:rPr lang="en-US" sz="4400" dirty="0">
                 <a:solidFill>
@@ -4568,6 +4327,7 @@
           </a:bodyPr>
           <a:lstStyle/>
           <a:p>
+            <a:pPr algn="l"/>
             <a:endParaRPr lang="en-US" sz="4400" dirty="0">
               <a:solidFill>
                 <a:schemeClr val="bg1"/>
@@ -4577,15 +4337,20 @@
             </a:endParaRPr>
           </a:p>
           <a:p>
-            <a:endParaRPr lang="en-US" sz="4400" dirty="0">
-              <a:solidFill>
-                <a:schemeClr val="bg1"/>
-              </a:solidFill>
-              <a:latin typeface="Avenir Medium" panose="02000503020000020003" pitchFamily="2" charset="0"/>
-              <a:ea typeface="Bodoni Ornaments" pitchFamily="2" charset="0"/>
-            </a:endParaRPr>
-          </a:p>
-          <a:p>
+            <a:pPr algn="l"/>
+            <a:r>
+              <a:rPr lang="en-US" sz="3600" dirty="0">
+                <a:solidFill>
+                  <a:srgbClr val="FFFF00"/>
+                </a:solidFill>
+                <a:latin typeface="Avenir Medium" panose="02000503020000020003" pitchFamily="2" charset="0"/>
+                <a:ea typeface="Bodoni Ornaments" pitchFamily="2" charset="0"/>
+              </a:rPr>
+              <a:t>            G</a:t>
+            </a:r>
+          </a:p>
+          <a:p>
+            <a:pPr algn="l"/>
             <a:r>
               <a:rPr lang="en-US" sz="4400" dirty="0">
                 <a:solidFill>
@@ -4598,6 +4363,20 @@
             </a:r>
           </a:p>
           <a:p>
+            <a:pPr algn="l"/>
+            <a:r>
+              <a:rPr lang="en-US" sz="3600" dirty="0">
+                <a:solidFill>
+                  <a:srgbClr val="FFFF00"/>
+                </a:solidFill>
+                <a:latin typeface="Avenir Medium" panose="02000503020000020003" pitchFamily="2" charset="0"/>
+                <a:ea typeface="Bodoni Ornaments" pitchFamily="2" charset="0"/>
+              </a:rPr>
+              <a:t>                     C</a:t>
+            </a:r>
+          </a:p>
+          <a:p>
+            <a:pPr algn="l"/>
             <a:r>
               <a:rPr lang="en-US" sz="4400" dirty="0">
                 <a:solidFill>
@@ -4610,6 +4389,17 @@
             </a:r>
           </a:p>
           <a:p>
+            <a:pPr algn="l"/>
+            <a:r>
+              <a:rPr lang="en-US" sz="3600" dirty="0">
+                <a:solidFill>
+                  <a:srgbClr val="FFFF00"/>
+                </a:solidFill>
+                <a:latin typeface="Avenir Medium" panose="02000503020000020003" pitchFamily="2" charset="0"/>
+                <a:ea typeface="Bodoni Ornaments" pitchFamily="2" charset="0"/>
+              </a:rPr>
+              <a:t>           D                        C                     G</a:t>
+            </a:r>
             <a:r>
               <a:rPr lang="en-US" sz="4400" dirty="0">
                 <a:solidFill>
@@ -4618,7 +4408,20 @@
                 <a:latin typeface="Avenir Medium" panose="02000503020000020003" pitchFamily="2" charset="0"/>
                 <a:ea typeface="Bodoni Ornaments" pitchFamily="2" charset="0"/>
               </a:rPr>
-              <a:t>  For a world of lost sinners was slain.</a:t>
+              <a:t> </a:t>
+            </a:r>
+          </a:p>
+          <a:p>
+            <a:pPr algn="l"/>
+            <a:r>
+              <a:rPr lang="en-US" sz="4400" dirty="0">
+                <a:solidFill>
+                  <a:schemeClr val="bg1"/>
+                </a:solidFill>
+                <a:latin typeface="Avenir Medium" panose="02000503020000020003" pitchFamily="2" charset="0"/>
+                <a:ea typeface="Bodoni Ornaments" pitchFamily="2" charset="0"/>
+              </a:rPr>
+              <a:t>For a world of lost sinners was slain.</a:t>
             </a:r>
           </a:p>
         </p:txBody>
@@ -4697,6 +4500,125 @@
           </a:bodyPr>
           <a:lstStyle/>
           <a:p>
+            <a:pPr algn="l"/>
+            <a:r>
+              <a:rPr lang="en-US" sz="4400" dirty="0">
+                <a:solidFill>
+                  <a:schemeClr val="bg1"/>
+                </a:solidFill>
+                <a:latin typeface="Avenir Medium" panose="02000503020000020003" pitchFamily="2" charset="0"/>
+                <a:ea typeface="Bodoni Ornaments" pitchFamily="2" charset="0"/>
+              </a:rPr>
+              <a:t>          </a:t>
+            </a:r>
+            <a:r>
+              <a:rPr lang="en-US" sz="3600" dirty="0">
+                <a:solidFill>
+                  <a:srgbClr val="FFFF00"/>
+                </a:solidFill>
+                <a:latin typeface="Avenir Medium" panose="02000503020000020003" pitchFamily="2" charset="0"/>
+                <a:ea typeface="Bodoni Ornaments" pitchFamily="2" charset="0"/>
+              </a:rPr>
+              <a:t>D                                            G</a:t>
+            </a:r>
+          </a:p>
+          <a:p>
+            <a:pPr algn="l"/>
+            <a:r>
+              <a:rPr lang="en-US" sz="4400" dirty="0">
+                <a:solidFill>
+                  <a:schemeClr val="bg1"/>
+                </a:solidFill>
+                <a:latin typeface="Avenir Medium" panose="02000503020000020003" pitchFamily="2" charset="0"/>
+                <a:ea typeface="Bodoni Ornaments" pitchFamily="2" charset="0"/>
+              </a:rPr>
+              <a:t>So I’ll cherish the old rugged cross</a:t>
+            </a:r>
+          </a:p>
+          <a:p>
+            <a:pPr algn="l"/>
+            <a:r>
+              <a:rPr lang="en-US" sz="3600" dirty="0">
+                <a:solidFill>
+                  <a:srgbClr val="FFFF00"/>
+                </a:solidFill>
+                <a:latin typeface="Avenir Medium" panose="02000503020000020003" pitchFamily="2" charset="0"/>
+                <a:ea typeface="Bodoni Ornaments" pitchFamily="2" charset="0"/>
+              </a:rPr>
+              <a:t>              C                                      G</a:t>
+            </a:r>
+          </a:p>
+          <a:p>
+            <a:pPr algn="l"/>
+            <a:r>
+              <a:rPr lang="en-US" sz="4400" dirty="0">
+                <a:solidFill>
+                  <a:schemeClr val="bg1"/>
+                </a:solidFill>
+                <a:latin typeface="Avenir Medium" panose="02000503020000020003" pitchFamily="2" charset="0"/>
+                <a:ea typeface="Bodoni Ornaments" pitchFamily="2" charset="0"/>
+              </a:rPr>
+              <a:t>Till my trophies at last I lay down</a:t>
+            </a:r>
+          </a:p>
+          <a:p>
+            <a:pPr algn="l"/>
+            <a:r>
+              <a:rPr lang="en-US" sz="3600" dirty="0">
+                <a:solidFill>
+                  <a:schemeClr val="bg1"/>
+                </a:solidFill>
+                <a:latin typeface="Avenir Medium" panose="02000503020000020003" pitchFamily="2" charset="0"/>
+                <a:ea typeface="Bodoni Ornaments" pitchFamily="2" charset="0"/>
+              </a:rPr>
+              <a:t>           </a:t>
+            </a:r>
+            <a:r>
+              <a:rPr lang="en-US" sz="3600" dirty="0">
+                <a:solidFill>
+                  <a:srgbClr val="FFFF00"/>
+                </a:solidFill>
+                <a:latin typeface="Avenir Medium" panose="02000503020000020003" pitchFamily="2" charset="0"/>
+                <a:ea typeface="Bodoni Ornaments" pitchFamily="2" charset="0"/>
+              </a:rPr>
+              <a:t>G                                            C</a:t>
+            </a:r>
+          </a:p>
+          <a:p>
+            <a:pPr algn="l"/>
+            <a:r>
+              <a:rPr lang="en-US" sz="4400" dirty="0">
+                <a:solidFill>
+                  <a:schemeClr val="bg1"/>
+                </a:solidFill>
+                <a:latin typeface="Avenir Medium" panose="02000503020000020003" pitchFamily="2" charset="0"/>
+                <a:ea typeface="Bodoni Ornaments" pitchFamily="2" charset="0"/>
+              </a:rPr>
+              <a:t>I will cling to the old rugged cross</a:t>
+            </a:r>
+          </a:p>
+          <a:p>
+            <a:pPr algn="l"/>
+            <a:r>
+              <a:rPr lang="en-US" sz="4400" dirty="0">
+                <a:solidFill>
+                  <a:schemeClr val="bg1"/>
+                </a:solidFill>
+                <a:latin typeface="Avenir Medium" panose="02000503020000020003" pitchFamily="2" charset="0"/>
+                <a:ea typeface="Bodoni Ornaments" pitchFamily="2" charset="0"/>
+              </a:rPr>
+              <a:t>  </a:t>
+            </a:r>
+            <a:r>
+              <a:rPr lang="en-US" sz="3600" dirty="0">
+                <a:solidFill>
+                  <a:srgbClr val="FFFF00"/>
+                </a:solidFill>
+                <a:latin typeface="Avenir Medium" panose="02000503020000020003" pitchFamily="2" charset="0"/>
+                <a:ea typeface="Bodoni Ornaments" pitchFamily="2" charset="0"/>
+              </a:rPr>
+              <a:t>        G                                D                 G</a:t>
+            </a:r>
             <a:endParaRPr lang="en-US" sz="4400" dirty="0">
               <a:solidFill>
                 <a:schemeClr val="bg1"/>
@@ -4706,15 +4628,7 @@
             </a:endParaRPr>
           </a:p>
           <a:p>
-            <a:endParaRPr lang="en-US" sz="4400" dirty="0">
-              <a:solidFill>
-                <a:schemeClr val="bg1"/>
-              </a:solidFill>
-              <a:latin typeface="Avenir Medium" panose="02000503020000020003" pitchFamily="2" charset="0"/>
-              <a:ea typeface="Bodoni Ornaments" pitchFamily="2" charset="0"/>
-            </a:endParaRPr>
-          </a:p>
-          <a:p>
+            <a:pPr algn="l"/>
             <a:r>
               <a:rPr lang="en-US" sz="4400" dirty="0">
                 <a:solidFill>
@@ -4723,31 +4637,11 @@
                 <a:latin typeface="Avenir Medium" panose="02000503020000020003" pitchFamily="2" charset="0"/>
                 <a:ea typeface="Bodoni Ornaments" pitchFamily="2" charset="0"/>
               </a:rPr>
-              <a:t>So I’ll cherish the old rugged cross</a:t>
-            </a:r>
-          </a:p>
-          <a:p>
-            <a:endParaRPr lang="en-US" sz="4400" dirty="0">
-              <a:solidFill>
-                <a:schemeClr val="bg1"/>
-              </a:solidFill>
-              <a:latin typeface="Avenir Medium" panose="02000503020000020003" pitchFamily="2" charset="0"/>
-              <a:ea typeface="Bodoni Ornaments" pitchFamily="2" charset="0"/>
-            </a:endParaRPr>
-          </a:p>
-          <a:p>
-            <a:r>
-              <a:rPr lang="en-US" sz="4400" dirty="0">
-                <a:solidFill>
-                  <a:schemeClr val="bg1"/>
-                </a:solidFill>
-                <a:latin typeface="Avenir Medium" panose="02000503020000020003" pitchFamily="2" charset="0"/>
-                <a:ea typeface="Bodoni Ornaments" pitchFamily="2" charset="0"/>
-              </a:rPr>
-              <a:t>Till my trophies at last I lay down</a:t>
-            </a:r>
-          </a:p>
-          <a:p>
+              <a:t>And exchange it some day for a crown</a:t>
+            </a:r>
+          </a:p>
+          <a:p>
+            <a:pPr algn="l"/>
             <a:endParaRPr lang="en-US" sz="4400" dirty="0">
               <a:solidFill>
                 <a:schemeClr val="bg1"/>
@@ -4772,135 +4666,6 @@
 </file>
 
 <file path=ppt/slides/slide5.xml><?xml version="1.0" encoding="utf-8"?>
-<p:sld xmlns:a="http://schemas.openxmlformats.org/drawingml/2006/main" xmlns:r="http://schemas.openxmlformats.org/officeDocument/2006/relationships" xmlns:p="http://schemas.openxmlformats.org/presentationml/2006/main">
-  <p:cSld>
-    <p:bg>
-      <p:bgPr>
-        <a:solidFill>
-          <a:schemeClr val="accent5">
-            <a:lumMod val="50000"/>
-          </a:schemeClr>
-        </a:solidFill>
-        <a:effectLst/>
-      </p:bgPr>
-    </p:bg>
-    <p:spTree>
-      <p:nvGrpSpPr>
-        <p:cNvPr id="1" name="">
-          <a:extLst>
-            <a:ext uri="{FF2B5EF4-FFF2-40B4-BE49-F238E27FC236}">
-              <a16:creationId xmlns:a16="http://schemas.microsoft.com/office/drawing/2014/main" id="{0D0DFF7F-A7AF-B016-173E-8639CE351D21}"/>
-            </a:ext>
-          </a:extLst>
-        </p:cNvPr>
-        <p:cNvGrpSpPr/>
-        <p:nvPr/>
-      </p:nvGrpSpPr>
-      <p:grpSpPr>
-        <a:xfrm>
-          <a:off x="0" y="0"/>
-          <a:ext cx="0" cy="0"/>
-          <a:chOff x="0" y="0"/>
-          <a:chExt cx="0" cy="0"/>
-        </a:xfrm>
-      </p:grpSpPr>
-      <p:sp>
-        <p:nvSpPr>
-          <p:cNvPr id="3" name="Subtitle 2">
-            <a:extLst>
-              <a:ext uri="{FF2B5EF4-FFF2-40B4-BE49-F238E27FC236}">
-                <a16:creationId xmlns:a16="http://schemas.microsoft.com/office/drawing/2014/main" id="{1AAADC52-6434-6795-A457-57E97496E04D}"/>
-              </a:ext>
-            </a:extLst>
-          </p:cNvPr>
-          <p:cNvSpPr>
-            <a:spLocks noGrp="1"/>
-          </p:cNvSpPr>
-          <p:nvPr>
-            <p:ph type="subTitle" idx="1"/>
-          </p:nvPr>
-        </p:nvSpPr>
-        <p:spPr>
-          <a:xfrm>
-            <a:off x="682831" y="497702"/>
-            <a:ext cx="10826338" cy="5862596"/>
-          </a:xfrm>
-        </p:spPr>
-        <p:txBody>
-          <a:bodyPr>
-            <a:noAutofit/>
-          </a:bodyPr>
-          <a:lstStyle/>
-          <a:p>
-            <a:endParaRPr lang="en-US" sz="4400" dirty="0">
-              <a:solidFill>
-                <a:schemeClr val="bg1"/>
-              </a:solidFill>
-              <a:latin typeface="Avenir Medium" panose="02000503020000020003" pitchFamily="2" charset="0"/>
-              <a:ea typeface="Bodoni Ornaments" pitchFamily="2" charset="0"/>
-            </a:endParaRPr>
-          </a:p>
-          <a:p>
-            <a:endParaRPr lang="en-US" sz="4400" dirty="0">
-              <a:solidFill>
-                <a:schemeClr val="bg1"/>
-              </a:solidFill>
-              <a:latin typeface="Avenir Medium" panose="02000503020000020003" pitchFamily="2" charset="0"/>
-              <a:ea typeface="Bodoni Ornaments" pitchFamily="2" charset="0"/>
-            </a:endParaRPr>
-          </a:p>
-          <a:p>
-            <a:r>
-              <a:rPr lang="en-US" sz="4400" dirty="0">
-                <a:solidFill>
-                  <a:schemeClr val="bg1"/>
-                </a:solidFill>
-                <a:latin typeface="Avenir Medium" panose="02000503020000020003" pitchFamily="2" charset="0"/>
-                <a:ea typeface="Bodoni Ornaments" pitchFamily="2" charset="0"/>
-              </a:rPr>
-              <a:t>I will cling to the old rugged cross</a:t>
-            </a:r>
-          </a:p>
-          <a:p>
-            <a:r>
-              <a:rPr lang="en-US" sz="4400" dirty="0">
-                <a:solidFill>
-                  <a:schemeClr val="bg1"/>
-                </a:solidFill>
-                <a:latin typeface="Avenir Medium" panose="02000503020000020003" pitchFamily="2" charset="0"/>
-                <a:ea typeface="Bodoni Ornaments" pitchFamily="2" charset="0"/>
-              </a:rPr>
-              <a:t>  </a:t>
-            </a:r>
-          </a:p>
-          <a:p>
-            <a:r>
-              <a:rPr lang="en-US" sz="4400" dirty="0">
-                <a:solidFill>
-                  <a:schemeClr val="bg1"/>
-                </a:solidFill>
-                <a:latin typeface="Avenir Medium" panose="02000503020000020003" pitchFamily="2" charset="0"/>
-                <a:ea typeface="Bodoni Ornaments" pitchFamily="2" charset="0"/>
-              </a:rPr>
-              <a:t>And exchange it some day for a crown</a:t>
-            </a:r>
-          </a:p>
-        </p:txBody>
-      </p:sp>
-    </p:spTree>
-    <p:extLst>
-      <p:ext uri="{BB962C8B-B14F-4D97-AF65-F5344CB8AC3E}">
-        <p14:creationId xmlns:p14="http://schemas.microsoft.com/office/powerpoint/2010/main" val="3176881118"/>
-      </p:ext>
-    </p:extLst>
-  </p:cSld>
-  <p:clrMapOvr>
-    <a:masterClrMapping/>
-  </p:clrMapOvr>
-</p:sld>
-</file>
-
-<file path=ppt/slides/slide6.xml><?xml version="1.0" encoding="utf-8"?>
 <p:sld xmlns:a="http://schemas.openxmlformats.org/drawingml/2006/main" xmlns:r="http://schemas.openxmlformats.org/officeDocument/2006/relationships" xmlns:p="http://schemas.openxmlformats.org/presentationml/2006/main">
   <p:cSld>
     <p:bg>
@@ -4959,6 +4724,7 @@
           </a:bodyPr>
           <a:lstStyle/>
           <a:p>
+            <a:pPr algn="l"/>
             <a:endParaRPr lang="en-US" sz="4400" dirty="0">
               <a:solidFill>
                 <a:schemeClr val="bg1"/>
@@ -4968,6 +4734,53 @@
             </a:endParaRPr>
           </a:p>
           <a:p>
+            <a:pPr algn="l"/>
+            <a:r>
+              <a:rPr lang="en-US" sz="3600" dirty="0">
+                <a:solidFill>
+                  <a:srgbClr val="FFFF00"/>
+                </a:solidFill>
+                <a:latin typeface="Avenir Medium" panose="02000503020000020003" pitchFamily="2" charset="0"/>
+                <a:ea typeface="Bodoni Ornaments" pitchFamily="2" charset="0"/>
+              </a:rPr>
+              <a:t>                  G</a:t>
+            </a:r>
+          </a:p>
+          <a:p>
+            <a:pPr algn="l"/>
+            <a:r>
+              <a:rPr lang="en-US" sz="4400" dirty="0">
+                <a:solidFill>
+                  <a:schemeClr val="bg1"/>
+                </a:solidFill>
+                <a:latin typeface="Avenir Medium" panose="02000503020000020003" pitchFamily="2" charset="0"/>
+                <a:ea typeface="Bodoni Ornaments" pitchFamily="2" charset="0"/>
+              </a:rPr>
+              <a:t>Oh, that old rugged cross, </a:t>
+            </a:r>
+          </a:p>
+          <a:p>
+            <a:pPr algn="l"/>
+            <a:r>
+              <a:rPr lang="en-US" sz="4400" dirty="0">
+                <a:solidFill>
+                  <a:schemeClr val="bg1"/>
+                </a:solidFill>
+                <a:latin typeface="Avenir Medium" panose="02000503020000020003" pitchFamily="2" charset="0"/>
+                <a:ea typeface="Bodoni Ornaments" pitchFamily="2" charset="0"/>
+              </a:rPr>
+              <a:t>               </a:t>
+            </a:r>
+            <a:r>
+              <a:rPr lang="en-US" sz="3600" dirty="0">
+                <a:solidFill>
+                  <a:srgbClr val="FFFF00"/>
+                </a:solidFill>
+                <a:latin typeface="Avenir Medium" panose="02000503020000020003" pitchFamily="2" charset="0"/>
+                <a:ea typeface="Bodoni Ornaments" pitchFamily="2" charset="0"/>
+              </a:rPr>
+              <a:t>C</a:t>
+            </a:r>
             <a:endParaRPr lang="en-US" sz="4400" dirty="0">
               <a:solidFill>
                 <a:schemeClr val="bg1"/>
@@ -4977,6 +4790,7 @@
             </a:endParaRPr>
           </a:p>
           <a:p>
+            <a:pPr algn="l"/>
             <a:r>
               <a:rPr lang="en-US" sz="4400" dirty="0">
                 <a:solidFill>
@@ -4985,10 +4799,24 @@
                 <a:latin typeface="Avenir Medium" panose="02000503020000020003" pitchFamily="2" charset="0"/>
                 <a:ea typeface="Bodoni Ornaments" pitchFamily="2" charset="0"/>
               </a:rPr>
-              <a:t>Oh, that old rugged cross, </a:t>
-            </a:r>
-          </a:p>
-          <a:p>
+              <a:t>so despised by the world</a:t>
+            </a:r>
+          </a:p>
+          <a:p>
+            <a:pPr algn="l"/>
+            <a:r>
+              <a:rPr lang="en-US" sz="3600" dirty="0">
+                <a:solidFill>
+                  <a:srgbClr val="FFFF00"/>
+                </a:solidFill>
+                <a:latin typeface="Avenir Medium" panose="02000503020000020003" pitchFamily="2" charset="0"/>
+                <a:ea typeface="Bodoni Ornaments" pitchFamily="2" charset="0"/>
+              </a:rPr>
+              <a:t>            D                                             G</a:t>
+            </a:r>
+          </a:p>
+          <a:p>
+            <a:pPr algn="l"/>
             <a:r>
               <a:rPr lang="en-US" sz="4400" dirty="0">
                 <a:solidFill>
@@ -4997,19 +4825,7 @@
                 <a:latin typeface="Avenir Medium" panose="02000503020000020003" pitchFamily="2" charset="0"/>
                 <a:ea typeface="Bodoni Ornaments" pitchFamily="2" charset="0"/>
               </a:rPr>
-              <a:t>so despised by the world</a:t>
-            </a:r>
-          </a:p>
-          <a:p>
-            <a:r>
-              <a:rPr lang="en-US" sz="4400" dirty="0">
-                <a:solidFill>
-                  <a:schemeClr val="bg1"/>
-                </a:solidFill>
-                <a:latin typeface="Avenir Medium" panose="02000503020000020003" pitchFamily="2" charset="0"/>
-                <a:ea typeface="Bodoni Ornaments" pitchFamily="2" charset="0"/>
-              </a:rPr>
-              <a:t>  Has a wondrous attraction for me</a:t>
+              <a:t>Has a wondrous attraction for me</a:t>
             </a:r>
           </a:p>
         </p:txBody>
@@ -5027,7 +4843,7 @@
 </p:sld>
 </file>
 
-<file path=ppt/slides/slide7.xml><?xml version="1.0" encoding="utf-8"?>
+<file path=ppt/slides/slide6.xml><?xml version="1.0" encoding="utf-8"?>
 <p:sld xmlns:a="http://schemas.openxmlformats.org/drawingml/2006/main" xmlns:r="http://schemas.openxmlformats.org/officeDocument/2006/relationships" xmlns:p="http://schemas.openxmlformats.org/presentationml/2006/main">
   <p:cSld>
     <p:bg>
@@ -5086,6 +4902,7 @@
           </a:bodyPr>
           <a:lstStyle/>
           <a:p>
+            <a:pPr algn="l"/>
             <a:endParaRPr lang="en-US" sz="4400" dirty="0">
               <a:solidFill>
                 <a:schemeClr val="bg1"/>
@@ -5095,15 +4912,20 @@
             </a:endParaRPr>
           </a:p>
           <a:p>
-            <a:endParaRPr lang="en-US" sz="4400" dirty="0">
-              <a:solidFill>
-                <a:schemeClr val="bg1"/>
-              </a:solidFill>
-              <a:latin typeface="Avenir Medium" panose="02000503020000020003" pitchFamily="2" charset="0"/>
-              <a:ea typeface="Bodoni Ornaments" pitchFamily="2" charset="0"/>
-            </a:endParaRPr>
-          </a:p>
-          <a:p>
+            <a:pPr algn="l"/>
+            <a:r>
+              <a:rPr lang="en-US" sz="3600" dirty="0">
+                <a:solidFill>
+                  <a:srgbClr val="FFFF00"/>
+                </a:solidFill>
+                <a:latin typeface="Avenir Medium" panose="02000503020000020003" pitchFamily="2" charset="0"/>
+                <a:ea typeface="Bodoni Ornaments" pitchFamily="2" charset="0"/>
+              </a:rPr>
+              <a:t>                G  </a:t>
+            </a:r>
+          </a:p>
+          <a:p>
+            <a:pPr algn="l"/>
             <a:r>
               <a:rPr lang="en-US" sz="4400" dirty="0">
                 <a:solidFill>
@@ -5116,6 +4938,20 @@
             </a:r>
           </a:p>
           <a:p>
+            <a:pPr algn="l"/>
+            <a:r>
+              <a:rPr lang="en-US" sz="3600" dirty="0">
+                <a:solidFill>
+                  <a:srgbClr val="FFFF00"/>
+                </a:solidFill>
+                <a:latin typeface="Avenir Medium" panose="02000503020000020003" pitchFamily="2" charset="0"/>
+                <a:ea typeface="Bodoni Ornaments" pitchFamily="2" charset="0"/>
+              </a:rPr>
+              <a:t>                C</a:t>
+            </a:r>
+          </a:p>
+          <a:p>
+            <a:pPr algn="l"/>
             <a:r>
               <a:rPr lang="en-US" sz="4400" dirty="0">
                 <a:solidFill>
@@ -5128,6 +4964,17 @@
             </a:r>
           </a:p>
           <a:p>
+            <a:pPr algn="l"/>
+            <a:r>
+              <a:rPr lang="en-US" sz="3600" dirty="0">
+                <a:solidFill>
+                  <a:srgbClr val="FFFF00"/>
+                </a:solidFill>
+                <a:latin typeface="Avenir Medium" panose="02000503020000020003" pitchFamily="2" charset="0"/>
+                <a:ea typeface="Bodoni Ornaments" pitchFamily="2" charset="0"/>
+              </a:rPr>
+              <a:t>      D                 C              G</a:t>
+            </a:r>
             <a:r>
               <a:rPr lang="en-US" sz="4400" dirty="0">
                 <a:solidFill>
@@ -5136,7 +4983,20 @@
                 <a:latin typeface="Avenir Medium" panose="02000503020000020003" pitchFamily="2" charset="0"/>
                 <a:ea typeface="Bodoni Ornaments" pitchFamily="2" charset="0"/>
               </a:rPr>
-              <a:t>  To bear it to dark Calvary</a:t>
+              <a:t>  </a:t>
+            </a:r>
+          </a:p>
+          <a:p>
+            <a:pPr algn="l"/>
+            <a:r>
+              <a:rPr lang="en-US" sz="4400" dirty="0">
+                <a:solidFill>
+                  <a:schemeClr val="bg1"/>
+                </a:solidFill>
+                <a:latin typeface="Avenir Medium" panose="02000503020000020003" pitchFamily="2" charset="0"/>
+                <a:ea typeface="Bodoni Ornaments" pitchFamily="2" charset="0"/>
+              </a:rPr>
+              <a:t>To bear it to dark Calvary</a:t>
             </a:r>
           </a:p>
         </p:txBody>
@@ -5154,7 +5014,7 @@
 </p:sld>
 </file>
 
-<file path=ppt/slides/slide8.xml><?xml version="1.0" encoding="utf-8"?>
+<file path=ppt/slides/slide7.xml><?xml version="1.0" encoding="utf-8"?>
 <p:sld xmlns:a="http://schemas.openxmlformats.org/drawingml/2006/main" xmlns:r="http://schemas.openxmlformats.org/officeDocument/2006/relationships" xmlns:p="http://schemas.openxmlformats.org/presentationml/2006/main">
   <p:cSld>
     <p:bg>
@@ -5172,7 +5032,7 @@
         <p:cNvPr id="1" name="">
           <a:extLst>
             <a:ext uri="{FF2B5EF4-FFF2-40B4-BE49-F238E27FC236}">
-              <a16:creationId xmlns:a16="http://schemas.microsoft.com/office/drawing/2014/main" id="{01CB2027-A9F3-ECA6-D77E-D9EB6DE0DF39}"/>
+              <a16:creationId xmlns:a16="http://schemas.microsoft.com/office/drawing/2014/main" id="{DCB07D70-9136-2D21-FAB5-2F1D979717D4}"/>
             </a:ext>
           </a:extLst>
         </p:cNvPr>
@@ -5192,7 +5052,7 @@
           <p:cNvPr id="3" name="Subtitle 2">
             <a:extLst>
               <a:ext uri="{FF2B5EF4-FFF2-40B4-BE49-F238E27FC236}">
-                <a16:creationId xmlns:a16="http://schemas.microsoft.com/office/drawing/2014/main" id="{E689129F-59E0-D186-9091-B108B345301E}"/>
+                <a16:creationId xmlns:a16="http://schemas.microsoft.com/office/drawing/2014/main" id="{0F488AF1-1A9F-5E29-7619-4887A868F9E7}"/>
               </a:ext>
             </a:extLst>
           </p:cNvPr>
@@ -5215,6 +5075,125 @@
           </a:bodyPr>
           <a:lstStyle/>
           <a:p>
+            <a:pPr algn="l"/>
+            <a:r>
+              <a:rPr lang="en-US" sz="4400" dirty="0">
+                <a:solidFill>
+                  <a:schemeClr val="bg1"/>
+                </a:solidFill>
+                <a:latin typeface="Avenir Medium" panose="02000503020000020003" pitchFamily="2" charset="0"/>
+                <a:ea typeface="Bodoni Ornaments" pitchFamily="2" charset="0"/>
+              </a:rPr>
+              <a:t>          </a:t>
+            </a:r>
+            <a:r>
+              <a:rPr lang="en-US" sz="3600" dirty="0">
+                <a:solidFill>
+                  <a:srgbClr val="FFFF00"/>
+                </a:solidFill>
+                <a:latin typeface="Avenir Medium" panose="02000503020000020003" pitchFamily="2" charset="0"/>
+                <a:ea typeface="Bodoni Ornaments" pitchFamily="2" charset="0"/>
+              </a:rPr>
+              <a:t>D                                            G</a:t>
+            </a:r>
+          </a:p>
+          <a:p>
+            <a:pPr algn="l"/>
+            <a:r>
+              <a:rPr lang="en-US" sz="4400" dirty="0">
+                <a:solidFill>
+                  <a:schemeClr val="bg1"/>
+                </a:solidFill>
+                <a:latin typeface="Avenir Medium" panose="02000503020000020003" pitchFamily="2" charset="0"/>
+                <a:ea typeface="Bodoni Ornaments" pitchFamily="2" charset="0"/>
+              </a:rPr>
+              <a:t>So I’ll cherish the old rugged cross</a:t>
+            </a:r>
+          </a:p>
+          <a:p>
+            <a:pPr algn="l"/>
+            <a:r>
+              <a:rPr lang="en-US" sz="3600" dirty="0">
+                <a:solidFill>
+                  <a:srgbClr val="FFFF00"/>
+                </a:solidFill>
+                <a:latin typeface="Avenir Medium" panose="02000503020000020003" pitchFamily="2" charset="0"/>
+                <a:ea typeface="Bodoni Ornaments" pitchFamily="2" charset="0"/>
+              </a:rPr>
+              <a:t>              C                                      G</a:t>
+            </a:r>
+          </a:p>
+          <a:p>
+            <a:pPr algn="l"/>
+            <a:r>
+              <a:rPr lang="en-US" sz="4400" dirty="0">
+                <a:solidFill>
+                  <a:schemeClr val="bg1"/>
+                </a:solidFill>
+                <a:latin typeface="Avenir Medium" panose="02000503020000020003" pitchFamily="2" charset="0"/>
+                <a:ea typeface="Bodoni Ornaments" pitchFamily="2" charset="0"/>
+              </a:rPr>
+              <a:t>Till my trophies at last I lay down</a:t>
+            </a:r>
+          </a:p>
+          <a:p>
+            <a:pPr algn="l"/>
+            <a:r>
+              <a:rPr lang="en-US" sz="3600" dirty="0">
+                <a:solidFill>
+                  <a:schemeClr val="bg1"/>
+                </a:solidFill>
+                <a:latin typeface="Avenir Medium" panose="02000503020000020003" pitchFamily="2" charset="0"/>
+                <a:ea typeface="Bodoni Ornaments" pitchFamily="2" charset="0"/>
+              </a:rPr>
+              <a:t>           </a:t>
+            </a:r>
+            <a:r>
+              <a:rPr lang="en-US" sz="3600" dirty="0">
+                <a:solidFill>
+                  <a:srgbClr val="FFFF00"/>
+                </a:solidFill>
+                <a:latin typeface="Avenir Medium" panose="02000503020000020003" pitchFamily="2" charset="0"/>
+                <a:ea typeface="Bodoni Ornaments" pitchFamily="2" charset="0"/>
+              </a:rPr>
+              <a:t>G                                            C</a:t>
+            </a:r>
+          </a:p>
+          <a:p>
+            <a:pPr algn="l"/>
+            <a:r>
+              <a:rPr lang="en-US" sz="4400" dirty="0">
+                <a:solidFill>
+                  <a:schemeClr val="bg1"/>
+                </a:solidFill>
+                <a:latin typeface="Avenir Medium" panose="02000503020000020003" pitchFamily="2" charset="0"/>
+                <a:ea typeface="Bodoni Ornaments" pitchFamily="2" charset="0"/>
+              </a:rPr>
+              <a:t>I will cling to the old rugged cross</a:t>
+            </a:r>
+          </a:p>
+          <a:p>
+            <a:pPr algn="l"/>
+            <a:r>
+              <a:rPr lang="en-US" sz="4400" dirty="0">
+                <a:solidFill>
+                  <a:schemeClr val="bg1"/>
+                </a:solidFill>
+                <a:latin typeface="Avenir Medium" panose="02000503020000020003" pitchFamily="2" charset="0"/>
+                <a:ea typeface="Bodoni Ornaments" pitchFamily="2" charset="0"/>
+              </a:rPr>
+              <a:t>  </a:t>
+            </a:r>
+            <a:r>
+              <a:rPr lang="en-US" sz="3600" dirty="0">
+                <a:solidFill>
+                  <a:srgbClr val="FFFF00"/>
+                </a:solidFill>
+                <a:latin typeface="Avenir Medium" panose="02000503020000020003" pitchFamily="2" charset="0"/>
+                <a:ea typeface="Bodoni Ornaments" pitchFamily="2" charset="0"/>
+              </a:rPr>
+              <a:t>        G                                D                 G</a:t>
+            </a:r>
             <a:endParaRPr lang="en-US" sz="4400" dirty="0">
               <a:solidFill>
                 <a:schemeClr val="bg1"/>
@@ -5224,6 +5203,20 @@
             </a:endParaRPr>
           </a:p>
           <a:p>
+            <a:pPr algn="l"/>
+            <a:r>
+              <a:rPr lang="en-US" sz="4400" dirty="0">
+                <a:solidFill>
+                  <a:schemeClr val="bg1"/>
+                </a:solidFill>
+                <a:latin typeface="Avenir Medium" panose="02000503020000020003" pitchFamily="2" charset="0"/>
+                <a:ea typeface="Bodoni Ornaments" pitchFamily="2" charset="0"/>
+              </a:rPr>
+              <a:t>And exchange it some day for a crown</a:t>
+            </a:r>
+          </a:p>
+          <a:p>
+            <a:pPr algn="l"/>
             <a:endParaRPr lang="en-US" sz="4400" dirty="0">
               <a:solidFill>
                 <a:schemeClr val="bg1"/>
@@ -5232,19 +5225,81 @@
               <a:ea typeface="Bodoni Ornaments" pitchFamily="2" charset="0"/>
             </a:endParaRPr>
           </a:p>
-          <a:p>
-            <a:r>
-              <a:rPr lang="en-US" sz="4400" dirty="0">
-                <a:solidFill>
-                  <a:schemeClr val="bg1"/>
-                </a:solidFill>
-                <a:latin typeface="Avenir Medium" panose="02000503020000020003" pitchFamily="2" charset="0"/>
-                <a:ea typeface="Bodoni Ornaments" pitchFamily="2" charset="0"/>
-              </a:rPr>
-              <a:t>So I’ll cherish the old rugged cross</a:t>
-            </a:r>
-          </a:p>
-          <a:p>
+        </p:txBody>
+      </p:sp>
+    </p:spTree>
+    <p:extLst>
+      <p:ext uri="{BB962C8B-B14F-4D97-AF65-F5344CB8AC3E}">
+        <p14:creationId xmlns:p14="http://schemas.microsoft.com/office/powerpoint/2010/main" val="1272684367"/>
+      </p:ext>
+    </p:extLst>
+  </p:cSld>
+  <p:clrMapOvr>
+    <a:masterClrMapping/>
+  </p:clrMapOvr>
+</p:sld>
+</file>
+
+<file path=ppt/slides/slide8.xml><?xml version="1.0" encoding="utf-8"?>
+<p:sld xmlns:a="http://schemas.openxmlformats.org/drawingml/2006/main" xmlns:r="http://schemas.openxmlformats.org/officeDocument/2006/relationships" xmlns:p="http://schemas.openxmlformats.org/presentationml/2006/main">
+  <p:cSld>
+    <p:bg>
+      <p:bgPr>
+        <a:solidFill>
+          <a:schemeClr val="accent1"/>
+        </a:solidFill>
+        <a:effectLst/>
+      </p:bgPr>
+    </p:bg>
+    <p:spTree>
+      <p:nvGrpSpPr>
+        <p:cNvPr id="1" name="">
+          <a:extLst>
+            <a:ext uri="{FF2B5EF4-FFF2-40B4-BE49-F238E27FC236}">
+              <a16:creationId xmlns:a16="http://schemas.microsoft.com/office/drawing/2014/main" id="{02E243F4-CB94-4B76-F4FF-E83C2857E4CA}"/>
+            </a:ext>
+          </a:extLst>
+        </p:cNvPr>
+        <p:cNvGrpSpPr/>
+        <p:nvPr/>
+      </p:nvGrpSpPr>
+      <p:grpSpPr>
+        <a:xfrm>
+          <a:off x="0" y="0"/>
+          <a:ext cx="0" cy="0"/>
+          <a:chOff x="0" y="0"/>
+          <a:chExt cx="0" cy="0"/>
+        </a:xfrm>
+      </p:grpSpPr>
+      <p:sp>
+        <p:nvSpPr>
+          <p:cNvPr id="3" name="Subtitle 2">
+            <a:extLst>
+              <a:ext uri="{FF2B5EF4-FFF2-40B4-BE49-F238E27FC236}">
+                <a16:creationId xmlns:a16="http://schemas.microsoft.com/office/drawing/2014/main" id="{8FD418CD-25A3-F123-3FB3-BBD6FDAC04B9}"/>
+              </a:ext>
+            </a:extLst>
+          </p:cNvPr>
+          <p:cNvSpPr>
+            <a:spLocks noGrp="1"/>
+          </p:cNvSpPr>
+          <p:nvPr>
+            <p:ph type="subTitle" idx="1"/>
+          </p:nvPr>
+        </p:nvSpPr>
+        <p:spPr>
+          <a:xfrm>
+            <a:off x="682831" y="497702"/>
+            <a:ext cx="10826338" cy="5862596"/>
+          </a:xfrm>
+        </p:spPr>
+        <p:txBody>
+          <a:bodyPr>
+            <a:noAutofit/>
+          </a:bodyPr>
+          <a:lstStyle/>
+          <a:p>
+            <a:pPr algn="l"/>
             <a:endParaRPr lang="en-US" sz="4400" dirty="0">
               <a:solidFill>
                 <a:schemeClr val="bg1"/>
@@ -5254,6 +5309,20 @@
             </a:endParaRPr>
           </a:p>
           <a:p>
+            <a:pPr algn="l"/>
+            <a:r>
+              <a:rPr lang="en-US" sz="3600" dirty="0">
+                <a:solidFill>
+                  <a:srgbClr val="FFFF00"/>
+                </a:solidFill>
+                <a:latin typeface="Avenir Medium" panose="02000503020000020003" pitchFamily="2" charset="0"/>
+                <a:ea typeface="Bodoni Ornaments" pitchFamily="2" charset="0"/>
+              </a:rPr>
+              <a:t>             G</a:t>
+            </a:r>
+          </a:p>
+          <a:p>
+            <a:pPr algn="l"/>
             <a:r>
               <a:rPr lang="en-US" sz="4400" dirty="0">
                 <a:solidFill>
@@ -5262,10 +5331,57 @@
                 <a:latin typeface="Avenir Medium" panose="02000503020000020003" pitchFamily="2" charset="0"/>
                 <a:ea typeface="Bodoni Ornaments" pitchFamily="2" charset="0"/>
               </a:rPr>
-              <a:t>Till my trophies at last I lay down</a:t>
-            </a:r>
-          </a:p>
-          <a:p>
+              <a:t>In the old rugged cross, </a:t>
+            </a:r>
+          </a:p>
+          <a:p>
+            <a:pPr algn="l"/>
+            <a:r>
+              <a:rPr lang="en-US" sz="3600" dirty="0">
+                <a:solidFill>
+                  <a:srgbClr val="FFFF00"/>
+                </a:solidFill>
+                <a:latin typeface="Avenir Medium" panose="02000503020000020003" pitchFamily="2" charset="0"/>
+                <a:ea typeface="Bodoni Ornaments" pitchFamily="2" charset="0"/>
+              </a:rPr>
+              <a:t>                         C</a:t>
+            </a:r>
+          </a:p>
+          <a:p>
+            <a:pPr algn="l"/>
+            <a:r>
+              <a:rPr lang="en-US" sz="4400" dirty="0">
+                <a:solidFill>
+                  <a:schemeClr val="bg1"/>
+                </a:solidFill>
+                <a:latin typeface="Avenir Medium" panose="02000503020000020003" pitchFamily="2" charset="0"/>
+                <a:ea typeface="Bodoni Ornaments" pitchFamily="2" charset="0"/>
+              </a:rPr>
+              <a:t>stained with blood so divine,</a:t>
+            </a:r>
+          </a:p>
+          <a:p>
+            <a:pPr algn="l"/>
+            <a:r>
+              <a:rPr lang="en-US" sz="4400" dirty="0">
+                <a:solidFill>
+                  <a:schemeClr val="bg1"/>
+                </a:solidFill>
+                <a:latin typeface="Avenir Medium" panose="02000503020000020003" pitchFamily="2" charset="0"/>
+                <a:ea typeface="Bodoni Ornaments" pitchFamily="2" charset="0"/>
+              </a:rPr>
+              <a:t>  </a:t>
+            </a:r>
+            <a:r>
+              <a:rPr lang="en-US" sz="3600" dirty="0">
+                <a:solidFill>
+                  <a:srgbClr val="FFFF00"/>
+                </a:solidFill>
+                <a:latin typeface="Avenir Medium" panose="02000503020000020003" pitchFamily="2" charset="0"/>
+                <a:ea typeface="Bodoni Ornaments" pitchFamily="2" charset="0"/>
+              </a:rPr>
+              <a:t>      D                             G</a:t>
+            </a:r>
             <a:endParaRPr lang="en-US" sz="4400" dirty="0">
               <a:solidFill>
                 <a:schemeClr val="bg1"/>
@@ -5274,12 +5390,25 @@
               <a:ea typeface="Bodoni Ornaments" pitchFamily="2" charset="0"/>
             </a:endParaRPr>
           </a:p>
+          <a:p>
+            <a:pPr algn="l"/>
+            <a:r>
+              <a:rPr lang="en-US" sz="4400" dirty="0">
+                <a:solidFill>
+                  <a:schemeClr val="bg1"/>
+                </a:solidFill>
+                <a:latin typeface="Avenir Medium" panose="02000503020000020003" pitchFamily="2" charset="0"/>
+                <a:ea typeface="Bodoni Ornaments" pitchFamily="2" charset="0"/>
+              </a:rPr>
+              <a:t>A wondrous beauty I see;</a:t>
+            </a:r>
+          </a:p>
         </p:txBody>
       </p:sp>
     </p:spTree>
     <p:extLst>
       <p:ext uri="{BB962C8B-B14F-4D97-AF65-F5344CB8AC3E}">
-        <p14:creationId xmlns:p14="http://schemas.microsoft.com/office/powerpoint/2010/main" val="2347016665"/>
+        <p14:creationId xmlns:p14="http://schemas.microsoft.com/office/powerpoint/2010/main" val="1369999494"/>
       </p:ext>
     </p:extLst>
   </p:cSld>
@@ -5295,9 +5424,7 @@
     <p:bg>
       <p:bgPr>
         <a:solidFill>
-          <a:schemeClr val="accent5">
-            <a:lumMod val="50000"/>
-          </a:schemeClr>
+          <a:schemeClr val="accent1"/>
         </a:solidFill>
         <a:effectLst/>
       </p:bgPr>
@@ -5307,7 +5434,7 @@
         <p:cNvPr id="1" name="">
           <a:extLst>
             <a:ext uri="{FF2B5EF4-FFF2-40B4-BE49-F238E27FC236}">
-              <a16:creationId xmlns:a16="http://schemas.microsoft.com/office/drawing/2014/main" id="{33F5F712-6C4A-B27C-24C4-7A986C64EB3E}"/>
+              <a16:creationId xmlns:a16="http://schemas.microsoft.com/office/drawing/2014/main" id="{51B7D9DD-9FDF-188B-B04F-CC4F610B705A}"/>
             </a:ext>
           </a:extLst>
         </p:cNvPr>
@@ -5327,7 +5454,7 @@
           <p:cNvPr id="3" name="Subtitle 2">
             <a:extLst>
               <a:ext uri="{FF2B5EF4-FFF2-40B4-BE49-F238E27FC236}">
-                <a16:creationId xmlns:a16="http://schemas.microsoft.com/office/drawing/2014/main" id="{23D4777C-F0DB-B32E-5DA8-88495BCCDA8A}"/>
+                <a16:creationId xmlns:a16="http://schemas.microsoft.com/office/drawing/2014/main" id="{E3DC8BB0-FF14-6E79-C19F-DC425DCC2CDA}"/>
               </a:ext>
             </a:extLst>
           </p:cNvPr>
@@ -5350,6 +5477,7 @@
           </a:bodyPr>
           <a:lstStyle/>
           <a:p>
+            <a:pPr algn="l"/>
             <a:endParaRPr lang="en-US" sz="4400" dirty="0">
               <a:solidFill>
                 <a:schemeClr val="bg1"/>
@@ -5359,6 +5487,53 @@
             </a:endParaRPr>
           </a:p>
           <a:p>
+            <a:pPr algn="l"/>
+            <a:r>
+              <a:rPr lang="en-US" sz="3600" dirty="0">
+                <a:solidFill>
+                  <a:srgbClr val="FFFF00"/>
+                </a:solidFill>
+                <a:latin typeface="Avenir Medium" panose="02000503020000020003" pitchFamily="2" charset="0"/>
+                <a:ea typeface="Bodoni Ornaments" pitchFamily="2" charset="0"/>
+              </a:rPr>
+              <a:t>                   G</a:t>
+            </a:r>
+          </a:p>
+          <a:p>
+            <a:pPr algn="l"/>
+            <a:r>
+              <a:rPr lang="en-US" sz="4400" dirty="0">
+                <a:solidFill>
+                  <a:schemeClr val="bg1"/>
+                </a:solidFill>
+                <a:latin typeface="Avenir Medium" panose="02000503020000020003" pitchFamily="2" charset="0"/>
+                <a:ea typeface="Bodoni Ornaments" pitchFamily="2" charset="0"/>
+              </a:rPr>
+              <a:t>For ’twas on that old cross </a:t>
+            </a:r>
+          </a:p>
+          <a:p>
+            <a:pPr algn="l"/>
+            <a:r>
+              <a:rPr lang="en-US" sz="4400" dirty="0">
+                <a:solidFill>
+                  <a:schemeClr val="bg1"/>
+                </a:solidFill>
+                <a:latin typeface="Avenir Medium" panose="02000503020000020003" pitchFamily="2" charset="0"/>
+                <a:ea typeface="Bodoni Ornaments" pitchFamily="2" charset="0"/>
+              </a:rPr>
+              <a:t>         </a:t>
+            </a:r>
+            <a:r>
+              <a:rPr lang="en-US" sz="3600" dirty="0">
+                <a:solidFill>
+                  <a:srgbClr val="FFFF00"/>
+                </a:solidFill>
+                <a:latin typeface="Avenir Medium" panose="02000503020000020003" pitchFamily="2" charset="0"/>
+                <a:ea typeface="Bodoni Ornaments" pitchFamily="2" charset="0"/>
+              </a:rPr>
+              <a:t>    C</a:t>
+            </a:r>
             <a:endParaRPr lang="en-US" sz="4400" dirty="0">
               <a:solidFill>
                 <a:schemeClr val="bg1"/>
@@ -5368,6 +5543,7 @@
             </a:endParaRPr>
           </a:p>
           <a:p>
+            <a:pPr algn="l"/>
             <a:r>
               <a:rPr lang="en-US" sz="4400" dirty="0">
                 <a:solidFill>
@@ -5376,10 +5552,11 @@
                 <a:latin typeface="Avenir Medium" panose="02000503020000020003" pitchFamily="2" charset="0"/>
                 <a:ea typeface="Bodoni Ornaments" pitchFamily="2" charset="0"/>
               </a:rPr>
-              <a:t>I will cling to the old rugged cross</a:t>
-            </a:r>
-          </a:p>
-          <a:p>
+              <a:t>Jesus suffered and died,</a:t>
+            </a:r>
+          </a:p>
+          <a:p>
+            <a:pPr algn="l"/>
             <a:r>
               <a:rPr lang="en-US" sz="4400" dirty="0">
                 <a:solidFill>
@@ -5388,10 +5565,18 @@
                 <a:latin typeface="Avenir Medium" panose="02000503020000020003" pitchFamily="2" charset="0"/>
                 <a:ea typeface="Bodoni Ornaments" pitchFamily="2" charset="0"/>
               </a:rPr>
-              <a:t>  </a:t>
-            </a:r>
-          </a:p>
-          <a:p>
+              <a:t> </a:t>
+            </a:r>
+            <a:r>
+              <a:rPr lang="en-US" sz="3600" dirty="0">
+                <a:solidFill>
+                  <a:srgbClr val="FFFF00"/>
+                </a:solidFill>
+                <a:latin typeface="Avenir Medium" panose="02000503020000020003" pitchFamily="2" charset="0"/>
+                <a:ea typeface="Bodoni Ornaments" pitchFamily="2" charset="0"/>
+              </a:rPr>
+              <a:t>     D                     C              G</a:t>
+            </a:r>
             <a:r>
               <a:rPr lang="en-US" sz="4400" dirty="0">
                 <a:solidFill>
@@ -5400,7 +5585,20 @@
                 <a:latin typeface="Avenir Medium" panose="02000503020000020003" pitchFamily="2" charset="0"/>
                 <a:ea typeface="Bodoni Ornaments" pitchFamily="2" charset="0"/>
               </a:rPr>
-              <a:t>And exchange it some day for a crown</a:t>
+              <a:t> </a:t>
+            </a:r>
+          </a:p>
+          <a:p>
+            <a:pPr algn="l"/>
+            <a:r>
+              <a:rPr lang="en-US" sz="4400" dirty="0">
+                <a:solidFill>
+                  <a:schemeClr val="bg1"/>
+                </a:solidFill>
+                <a:latin typeface="Avenir Medium" panose="02000503020000020003" pitchFamily="2" charset="0"/>
+                <a:ea typeface="Bodoni Ornaments" pitchFamily="2" charset="0"/>
+              </a:rPr>
+              <a:t>To pardon and sanctify me</a:t>
             </a:r>
           </a:p>
         </p:txBody>
@@ -5408,7 +5606,7 @@
     </p:spTree>
     <p:extLst>
       <p:ext uri="{BB962C8B-B14F-4D97-AF65-F5344CB8AC3E}">
-        <p14:creationId xmlns:p14="http://schemas.microsoft.com/office/powerpoint/2010/main" val="857351653"/>
+        <p14:creationId xmlns:p14="http://schemas.microsoft.com/office/powerpoint/2010/main" val="743354268"/>
       </p:ext>
     </p:extLst>
   </p:cSld>
